--- a/ゲーム科3年/00_前期/ゲームエンジンⅤ/06_Pawnでプレイヤー作成.pptx
+++ b/ゲーム科3年/00_前期/ゲームエンジンⅤ/06_Pawnでプレイヤー作成.pptx
@@ -290,7 +290,7 @@
           <a:p>
             <a:fld id="{E9CC885B-4903-4D54-9A93-00025F12DED9}" type="datetimeFigureOut">
               <a:rPr kumimoji="1" lang="ja-JP" altLang="en-US" smtClean="0"/>
-              <a:t>2025/2/19</a:t>
+              <a:t>2026/3/26</a:t>
             </a:fld>
             <a:endParaRPr kumimoji="1" lang="ja-JP" altLang="en-US"/>
           </a:p>
@@ -520,7 +520,7 @@
           <a:p>
             <a:fld id="{E9CC885B-4903-4D54-9A93-00025F12DED9}" type="datetimeFigureOut">
               <a:rPr kumimoji="1" lang="ja-JP" altLang="en-US" smtClean="0"/>
-              <a:t>2025/2/19</a:t>
+              <a:t>2026/3/26</a:t>
             </a:fld>
             <a:endParaRPr kumimoji="1" lang="ja-JP" altLang="en-US"/>
           </a:p>
@@ -760,7 +760,7 @@
           <a:p>
             <a:fld id="{E9CC885B-4903-4D54-9A93-00025F12DED9}" type="datetimeFigureOut">
               <a:rPr kumimoji="1" lang="ja-JP" altLang="en-US" smtClean="0"/>
-              <a:t>2025/2/19</a:t>
+              <a:t>2026/3/26</a:t>
             </a:fld>
             <a:endParaRPr kumimoji="1" lang="ja-JP" altLang="en-US"/>
           </a:p>
@@ -990,7 +990,7 @@
           <a:p>
             <a:fld id="{E9CC885B-4903-4D54-9A93-00025F12DED9}" type="datetimeFigureOut">
               <a:rPr kumimoji="1" lang="ja-JP" altLang="en-US" smtClean="0"/>
-              <a:t>2025/2/19</a:t>
+              <a:t>2026/3/26</a:t>
             </a:fld>
             <a:endParaRPr kumimoji="1" lang="ja-JP" altLang="en-US"/>
           </a:p>
@@ -1265,7 +1265,7 @@
           <a:p>
             <a:fld id="{E9CC885B-4903-4D54-9A93-00025F12DED9}" type="datetimeFigureOut">
               <a:rPr kumimoji="1" lang="ja-JP" altLang="en-US" smtClean="0"/>
-              <a:t>2025/2/19</a:t>
+              <a:t>2026/3/26</a:t>
             </a:fld>
             <a:endParaRPr kumimoji="1" lang="ja-JP" altLang="en-US"/>
           </a:p>
@@ -1594,7 +1594,7 @@
           <a:p>
             <a:fld id="{E9CC885B-4903-4D54-9A93-00025F12DED9}" type="datetimeFigureOut">
               <a:rPr kumimoji="1" lang="ja-JP" altLang="en-US" smtClean="0"/>
-              <a:t>2025/2/19</a:t>
+              <a:t>2026/3/26</a:t>
             </a:fld>
             <a:endParaRPr kumimoji="1" lang="ja-JP" altLang="en-US"/>
           </a:p>
@@ -2070,7 +2070,7 @@
           <a:p>
             <a:fld id="{E9CC885B-4903-4D54-9A93-00025F12DED9}" type="datetimeFigureOut">
               <a:rPr kumimoji="1" lang="ja-JP" altLang="en-US" smtClean="0"/>
-              <a:t>2025/2/19</a:t>
+              <a:t>2026/3/26</a:t>
             </a:fld>
             <a:endParaRPr kumimoji="1" lang="ja-JP" altLang="en-US"/>
           </a:p>
@@ -2211,7 +2211,7 @@
           <a:p>
             <a:fld id="{E9CC885B-4903-4D54-9A93-00025F12DED9}" type="datetimeFigureOut">
               <a:rPr kumimoji="1" lang="ja-JP" altLang="en-US" smtClean="0"/>
-              <a:t>2025/2/19</a:t>
+              <a:t>2026/3/26</a:t>
             </a:fld>
             <a:endParaRPr kumimoji="1" lang="ja-JP" altLang="en-US"/>
           </a:p>
@@ -2324,7 +2324,7 @@
           <a:p>
             <a:fld id="{E9CC885B-4903-4D54-9A93-00025F12DED9}" type="datetimeFigureOut">
               <a:rPr kumimoji="1" lang="ja-JP" altLang="en-US" smtClean="0"/>
-              <a:t>2025/2/19</a:t>
+              <a:t>2026/3/26</a:t>
             </a:fld>
             <a:endParaRPr kumimoji="1" lang="ja-JP" altLang="en-US"/>
           </a:p>
@@ -2667,7 +2667,7 @@
           <a:p>
             <a:fld id="{E9CC885B-4903-4D54-9A93-00025F12DED9}" type="datetimeFigureOut">
               <a:rPr kumimoji="1" lang="ja-JP" altLang="en-US" smtClean="0"/>
-              <a:t>2025/2/19</a:t>
+              <a:t>2026/3/26</a:t>
             </a:fld>
             <a:endParaRPr kumimoji="1" lang="ja-JP" altLang="en-US"/>
           </a:p>
@@ -2955,7 +2955,7 @@
           <a:p>
             <a:fld id="{E9CC885B-4903-4D54-9A93-00025F12DED9}" type="datetimeFigureOut">
               <a:rPr kumimoji="1" lang="ja-JP" altLang="en-US" smtClean="0"/>
-              <a:t>2025/2/19</a:t>
+              <a:t>2026/3/26</a:t>
             </a:fld>
             <a:endParaRPr kumimoji="1" lang="ja-JP" altLang="en-US"/>
           </a:p>
@@ -3228,7 +3228,7 @@
           <a:p>
             <a:fld id="{E9CC885B-4903-4D54-9A93-00025F12DED9}" type="datetimeFigureOut">
               <a:rPr kumimoji="1" lang="ja-JP" altLang="en-US" smtClean="0"/>
-              <a:t>2025/2/19</a:t>
+              <a:t>2026/3/26</a:t>
             </a:fld>
             <a:endParaRPr kumimoji="1" lang="ja-JP" altLang="en-US"/>
           </a:p>
@@ -7083,7 +7083,7 @@
             </a:r>
             <a:r>
               <a:rPr lang="ja-JP" altLang="en-US" sz="2400" dirty="0"/>
-              <a:t>は編集したらコンパイルして保存しましょう。</a:t>
+              <a:t>を編集したらコンパイルして保存しましょう。</a:t>
             </a:r>
             <a:endParaRPr lang="en-US" altLang="ja-JP" sz="2400" dirty="0"/>
           </a:p>
